--- a/TODO EL PROYECTO ELITE GAMES/Presentaciones/Elite_Games_Presentacion Trimestre III.pptx
+++ b/TODO EL PROYECTO ELITE GAMES/Presentaciones/Elite_Games_Presentacion Trimestre III.pptx
@@ -26,16 +26,17 @@
     <p:sldId id="271" r:id="rId21"/>
     <p:sldId id="272" r:id="rId22"/>
     <p:sldId id="273" r:id="rId23"/>
+    <p:sldId id="274" r:id="rId24"/>
   </p:sldIdLst>
   <p:sldSz cy="6858000" cx="12192000"/>
   <p:notesSz cx="6858000" cy="9144000"/>
   <p:embeddedFontLst>
     <p:embeddedFont>
       <p:font typeface="Work Sans"/>
-      <p:regular r:id="rId24"/>
-      <p:bold r:id="rId25"/>
-      <p:italic r:id="rId26"/>
-      <p:boldItalic r:id="rId27"/>
+      <p:regular r:id="rId25"/>
+      <p:bold r:id="rId26"/>
+      <p:italic r:id="rId27"/>
+      <p:boldItalic r:id="rId28"/>
     </p:embeddedFont>
   </p:embeddedFontLst>
   <p:defaultTextStyle>
@@ -288,7 +289,7 @@
       </p15:sldGuideLst>
     </p:ext>
     <p:ext uri="GoogleSlidesCustomDataVersion2">
-      <go:slidesCustomData xmlns:go="http://customooxmlschemas.google.com/" r:id="rId28" roundtripDataSignature="AMtx7mg0c+cFIc5QOMb0cLB+BqWXfnh7yw=="/>
+      <go:slidesCustomData xmlns:go="http://customooxmlschemas.google.com/" r:id="rId29" roundtripDataSignature="AMtx7mjEwM+ZQlyBCmevjCDxeVRQfFTSPg=="/>
     </p:ext>
   </p:extLst>
 </p:presentation>
@@ -3178,7 +3179,184 @@
       </p:grpSpPr>
       <p:sp>
         <p:nvSpPr>
-          <p:cNvPr id="213" name="Google Shape;213;p7:notes"/>
+          <p:cNvPr id="213" name="Google Shape;213;g3f00d7c0ea7_1_5:notes"/>
+          <p:cNvSpPr/>
+          <p:nvPr>
+            <p:ph idx="2" type="sldImg"/>
+          </p:nvPr>
+        </p:nvSpPr>
+        <p:spPr>
+          <a:xfrm>
+            <a:off x="685800" y="1143000"/>
+            <a:ext cx="5486400" cy="3086100"/>
+          </a:xfrm>
+          <a:custGeom>
+            <a:rect b="b" l="l" r="r" t="t"/>
+            <a:pathLst>
+              <a:path extrusionOk="0" h="120000" w="120000">
+                <a:moveTo>
+                  <a:pt x="0" y="0"/>
+                </a:moveTo>
+                <a:lnTo>
+                  <a:pt x="120000" y="0"/>
+                </a:lnTo>
+                <a:lnTo>
+                  <a:pt x="120000" y="120000"/>
+                </a:lnTo>
+                <a:lnTo>
+                  <a:pt x="0" y="120000"/>
+                </a:lnTo>
+                <a:close/>
+              </a:path>
+            </a:pathLst>
+          </a:custGeom>
+          <a:noFill/>
+          <a:ln cap="flat" cmpd="sng" w="12700">
+            <a:solidFill>
+              <a:srgbClr val="000000"/>
+            </a:solidFill>
+            <a:prstDash val="solid"/>
+            <a:round/>
+            <a:headEnd len="sm" w="sm" type="none"/>
+            <a:tailEnd len="sm" w="sm" type="none"/>
+          </a:ln>
+        </p:spPr>
+      </p:sp>
+      <p:sp>
+        <p:nvSpPr>
+          <p:cNvPr id="214" name="Google Shape;214;g3f00d7c0ea7_1_5:notes"/>
+          <p:cNvSpPr txBox="1"/>
+          <p:nvPr>
+            <p:ph idx="1" type="body"/>
+          </p:nvPr>
+        </p:nvSpPr>
+        <p:spPr>
+          <a:xfrm>
+            <a:off x="685800" y="4400550"/>
+            <a:ext cx="5486400" cy="3600600"/>
+          </a:xfrm>
+          <a:prstGeom prst="rect">
+            <a:avLst/>
+          </a:prstGeom>
+          <a:noFill/>
+          <a:ln>
+            <a:noFill/>
+          </a:ln>
+        </p:spPr>
+        <p:txBody>
+          <a:bodyPr anchorCtr="0" anchor="t" bIns="45700" lIns="91425" spcFirstLastPara="1" rIns="91425" wrap="square" tIns="45700">
+            <a:noAutofit/>
+          </a:bodyPr>
+          <a:lstStyle/>
+          <a:p>
+            <a:pPr indent="0" lvl="0" marL="0" rtl="0" algn="l">
+              <a:lnSpc>
+                <a:spcPct val="100000"/>
+              </a:lnSpc>
+              <a:spcBef>
+                <a:spcPts val="0"/>
+              </a:spcBef>
+              <a:spcAft>
+                <a:spcPts val="0"/>
+              </a:spcAft>
+              <a:buSzPts val="1400"/>
+              <a:buNone/>
+            </a:pPr>
+            <a:r>
+              <a:t/>
+            </a:r>
+            <a:endParaRPr b="0" i="0" sz="1200" u="none" cap="none" strike="noStrike">
+              <a:solidFill>
+                <a:schemeClr val="dk1"/>
+              </a:solidFill>
+              <a:latin typeface="Calibri"/>
+              <a:ea typeface="Calibri"/>
+              <a:cs typeface="Calibri"/>
+              <a:sym typeface="Calibri"/>
+            </a:endParaRPr>
+          </a:p>
+        </p:txBody>
+      </p:sp>
+      <p:sp>
+        <p:nvSpPr>
+          <p:cNvPr id="215" name="Google Shape;215;g3f00d7c0ea7_1_5:notes"/>
+          <p:cNvSpPr txBox="1"/>
+          <p:nvPr>
+            <p:ph idx="12" type="sldNum"/>
+          </p:nvPr>
+        </p:nvSpPr>
+        <p:spPr>
+          <a:xfrm>
+            <a:off x="3884613" y="8685213"/>
+            <a:ext cx="2971800" cy="458700"/>
+          </a:xfrm>
+          <a:prstGeom prst="rect">
+            <a:avLst/>
+          </a:prstGeom>
+          <a:noFill/>
+          <a:ln>
+            <a:noFill/>
+          </a:ln>
+        </p:spPr>
+        <p:txBody>
+          <a:bodyPr anchorCtr="0" anchor="b" bIns="45700" lIns="91425" spcFirstLastPara="1" rIns="91425" wrap="square" tIns="45700">
+            <a:noAutofit/>
+          </a:bodyPr>
+          <a:lstStyle/>
+          <a:p>
+            <a:pPr indent="0" lvl="0" marL="0" rtl="0" algn="r">
+              <a:lnSpc>
+                <a:spcPct val="100000"/>
+              </a:lnSpc>
+              <a:spcBef>
+                <a:spcPts val="0"/>
+              </a:spcBef>
+              <a:spcAft>
+                <a:spcPts val="0"/>
+              </a:spcAft>
+              <a:buClr>
+                <a:srgbClr val="000000"/>
+              </a:buClr>
+              <a:buSzPts val="1400"/>
+              <a:buFont typeface="Arial"/>
+              <a:buNone/>
+            </a:pPr>
+            <a:fld id="{00000000-1234-1234-1234-123412341234}" type="slidenum">
+              <a:rPr lang="en-US"/>
+              <a:t>‹#›</a:t>
+            </a:fld>
+            <a:endParaRPr/>
+          </a:p>
+        </p:txBody>
+      </p:sp>
+    </p:spTree>
+  </p:cSld>
+  <p:clrMapOvr>
+    <a:masterClrMapping/>
+  </p:clrMapOvr>
+</p:notes>
+</file>
+
+<file path=ppt/notesSlides/notesSlide19.xml><?xml version="1.0" encoding="utf-8"?>
+<p:notes xmlns:a="http://schemas.openxmlformats.org/drawingml/2006/main" xmlns:r="http://schemas.openxmlformats.org/officeDocument/2006/relationships" xmlns:mc="http://schemas.openxmlformats.org/markup-compatibility/2006" xmlns:mv="urn:schemas-microsoft-com:mac:vml" xmlns:p="http://schemas.openxmlformats.org/presentationml/2006/main" xmlns:c="http://schemas.openxmlformats.org/drawingml/2006/chart" xmlns:dgm="http://schemas.openxmlformats.org/drawingml/2006/diagram" xmlns:o="urn:schemas-microsoft-com:office:office" xmlns:v="urn:schemas-microsoft-com:vml" xmlns:pvml="urn:schemas-microsoft-com:office:powerpoint" xmlns:com="http://schemas.openxmlformats.org/drawingml/2006/compatibility" xmlns:p14="http://schemas.microsoft.com/office/powerpoint/2010/main" xmlns:p15="http://schemas.microsoft.com/office/powerpoint/2012/main" xmlns:ahyp="http://schemas.microsoft.com/office/drawing/2018/hyperlinkcolor" showMasterPhAnim="0" showMasterSp="0">
+  <p:cSld>
+    <p:spTree>
+      <p:nvGrpSpPr>
+        <p:cNvPr id="219" name="Shape 219"/>
+        <p:cNvGrpSpPr/>
+        <p:nvPr/>
+      </p:nvGrpSpPr>
+      <p:grpSpPr>
+        <a:xfrm>
+          <a:off x="0" y="0"/>
+          <a:ext cx="0" cy="0"/>
+          <a:chOff x="0" y="0"/>
+          <a:chExt cx="0" cy="0"/>
+        </a:xfrm>
+      </p:grpSpPr>
+      <p:sp>
+        <p:nvSpPr>
+          <p:cNvPr id="220" name="Google Shape;220;p7:notes"/>
           <p:cNvSpPr txBox="1"/>
           <p:nvPr>
             <p:ph idx="1" type="body"/>
@@ -3233,7 +3411,7 @@
       </p:sp>
       <p:sp>
         <p:nvSpPr>
-          <p:cNvPr id="214" name="Google Shape;214;p7:notes"/>
+          <p:cNvPr id="221" name="Google Shape;221;p7:notes"/>
           <p:cNvSpPr/>
           <p:nvPr>
             <p:ph idx="2" type="sldImg"/>
@@ -18740,7 +18918,7 @@
         </p:nvSpPr>
         <p:spPr>
           <a:xfrm>
-            <a:off x="44300" y="0"/>
+            <a:off x="0" y="-251525"/>
             <a:ext cx="12192000" cy="1196100"/>
           </a:xfrm>
           <a:prstGeom prst="rect">
@@ -18797,21 +18975,22 @@
       </p:sp>
       <p:pic>
         <p:nvPicPr>
-          <p:cNvPr id="161" name="Google Shape;161;g3ed1c95a546_0_25" title="Tabla-Worbench.png"/>
+          <p:cNvPr id="161" name="Google Shape;161;g3ed1c95a546_0_25"/>
           <p:cNvPicPr preferRelativeResize="0"/>
           <p:nvPr/>
         </p:nvPicPr>
-        <p:blipFill rotWithShape="1">
+        <p:blipFill>
           <a:blip r:embed="rId3">
             <a:alphaModFix/>
           </a:blip>
-          <a:srcRect b="30168" l="0" r="0" t="0"/>
-          <a:stretch/>
+          <a:stretch>
+            <a:fillRect/>
+          </a:stretch>
         </p:blipFill>
         <p:spPr>
           <a:xfrm>
-            <a:off x="98350" y="1196100"/>
-            <a:ext cx="12083901" cy="5876726"/>
+            <a:off x="0" y="872825"/>
+            <a:ext cx="12191999" cy="6699775"/>
           </a:xfrm>
           <a:prstGeom prst="rect">
             <a:avLst/>
@@ -18847,37 +19026,9 @@
           <a:chExt cx="0" cy="0"/>
         </a:xfrm>
       </p:grpSpPr>
-      <p:pic>
-        <p:nvPicPr>
-          <p:cNvPr id="167" name="Google Shape;167;g3ed1c95a546_0_16"/>
-          <p:cNvPicPr preferRelativeResize="0"/>
-          <p:nvPr/>
-        </p:nvPicPr>
-        <p:blipFill>
-          <a:blip r:embed="rId3">
-            <a:alphaModFix/>
-          </a:blip>
-          <a:stretch>
-            <a:fillRect/>
-          </a:stretch>
-        </p:blipFill>
-        <p:spPr>
-          <a:xfrm>
-            <a:off x="600538" y="784050"/>
-            <a:ext cx="10990924" cy="5673525"/>
-          </a:xfrm>
-          <a:prstGeom prst="rect">
-            <a:avLst/>
-          </a:prstGeom>
-          <a:noFill/>
-          <a:ln>
-            <a:noFill/>
-          </a:ln>
-        </p:spPr>
-      </p:pic>
       <p:sp>
         <p:nvSpPr>
-          <p:cNvPr id="168" name="Google Shape;168;g3ed1c95a546_0_16"/>
+          <p:cNvPr id="167" name="Google Shape;167;g3ed1c95a546_0_16"/>
           <p:cNvSpPr/>
           <p:nvPr/>
         </p:nvSpPr>
@@ -18946,6 +19097,34 @@
           </a:p>
         </p:txBody>
       </p:sp>
+      <p:pic>
+        <p:nvPicPr>
+          <p:cNvPr id="168" name="Google Shape;168;g3ed1c95a546_0_16"/>
+          <p:cNvPicPr preferRelativeResize="0"/>
+          <p:nvPr/>
+        </p:nvPicPr>
+        <p:blipFill>
+          <a:blip r:embed="rId3">
+            <a:alphaModFix/>
+          </a:blip>
+          <a:stretch>
+            <a:fillRect/>
+          </a:stretch>
+        </p:blipFill>
+        <p:spPr>
+          <a:xfrm>
+            <a:off x="157725" y="784175"/>
+            <a:ext cx="11887198" cy="2896419"/>
+          </a:xfrm>
+          <a:prstGeom prst="rect">
+            <a:avLst/>
+          </a:prstGeom>
+          <a:noFill/>
+          <a:ln>
+            <a:noFill/>
+          </a:ln>
+        </p:spPr>
+      </p:pic>
       <p:sp>
         <p:nvSpPr>
           <p:cNvPr id="169" name="Google Shape;169;g3ed1c95a546_0_16"/>
@@ -18954,8 +19133,8 @@
         </p:nvSpPr>
         <p:spPr>
           <a:xfrm>
-            <a:off x="1250400" y="6457575"/>
-            <a:ext cx="9691200" cy="400200"/>
+            <a:off x="2836500" y="4340425"/>
+            <a:ext cx="6519000" cy="1077300"/>
           </a:xfrm>
           <a:prstGeom prst="rect">
             <a:avLst/>
@@ -18981,15 +19160,23 @@
               <a:buNone/>
             </a:pPr>
             <a:r>
-              <a:rPr lang="en-US" u="sng">
+              <a:rPr lang="en-US" sz="2900" u="sng">
                 <a:solidFill>
                   <a:schemeClr val="hlink"/>
                 </a:solidFill>
                 <a:hlinkClick r:id="rId4"/>
               </a:rPr>
-              <a:t>https://docs.google.com/spreadsheets/d/1Oyy3ILBiDJ2r4bdSo6RhQRwF61AOLGKPQPRrxvV5mBs/edit?usp=sharing</a:t>
+              <a:t>EliteGames_FormaNoNormalizada (3).xlsx - Hojas de cálculo de Google</a:t>
             </a:r>
-            <a:endParaRPr/>
+            <a:r>
+              <a:rPr lang="en-US" sz="2900">
+                <a:solidFill>
+                  <a:schemeClr val="dk1"/>
+                </a:solidFill>
+              </a:rPr>
+              <a:t> </a:t>
+            </a:r>
+            <a:endParaRPr sz="3200"/>
           </a:p>
         </p:txBody>
       </p:sp>
@@ -19112,16 +19299,44 @@
           </a:p>
         </p:txBody>
       </p:sp>
+      <p:pic>
+        <p:nvPicPr>
+          <p:cNvPr id="176" name="Google Shape;176;g3ed3806e173_0_10"/>
+          <p:cNvPicPr preferRelativeResize="0"/>
+          <p:nvPr/>
+        </p:nvPicPr>
+        <p:blipFill>
+          <a:blip r:embed="rId3">
+            <a:alphaModFix/>
+          </a:blip>
+          <a:stretch>
+            <a:fillRect/>
+          </a:stretch>
+        </p:blipFill>
+        <p:spPr>
+          <a:xfrm>
+            <a:off x="3117513" y="1196100"/>
+            <a:ext cx="5956976" cy="5000300"/>
+          </a:xfrm>
+          <a:prstGeom prst="rect">
+            <a:avLst/>
+          </a:prstGeom>
+          <a:noFill/>
+          <a:ln>
+            <a:noFill/>
+          </a:ln>
+        </p:spPr>
+      </p:pic>
       <p:sp>
         <p:nvSpPr>
-          <p:cNvPr id="176" name="Google Shape;176;g3ed3806e173_0_10"/>
+          <p:cNvPr id="177" name="Google Shape;177;g3ed3806e173_0_10"/>
           <p:cNvSpPr txBox="1"/>
           <p:nvPr/>
         </p:nvSpPr>
         <p:spPr>
           <a:xfrm>
-            <a:off x="3524250" y="6000825"/>
-            <a:ext cx="5143500" cy="757500"/>
+            <a:off x="2146550" y="6373900"/>
+            <a:ext cx="7987500" cy="400200"/>
           </a:xfrm>
           <a:prstGeom prst="rect">
             <a:avLst/>
@@ -19133,7 +19348,7 @@
         </p:spPr>
         <p:txBody>
           <a:bodyPr anchorCtr="0" anchor="t" bIns="91425" lIns="91425" spcFirstLastPara="1" rIns="91425" wrap="square" tIns="91425">
-            <a:noAutofit/>
+            <a:spAutoFit/>
           </a:bodyPr>
           <a:lstStyle/>
           <a:p>
@@ -19147,70 +19362,18 @@
               <a:buNone/>
             </a:pPr>
             <a:r>
-              <a:rPr lang="en-US" sz="2800" u="sng">
+              <a:rPr lang="en-US" u="sng">
                 <a:solidFill>
                   <a:schemeClr val="hlink"/>
                 </a:solidFill>
-                <a:latin typeface="Calibri"/>
-                <a:ea typeface="Calibri"/>
-                <a:cs typeface="Calibri"/>
-                <a:sym typeface="Calibri"/>
-                <a:hlinkClick r:id="rId3"/>
-              </a:rPr>
-              <a:t>Diccionario de Datos - </a:t>
-            </a:r>
-            <a:r>
-              <a:rPr lang="en-US" sz="2800" u="sng">
-                <a:solidFill>
-                  <a:schemeClr val="hlink"/>
-                </a:solidFill>
-                <a:latin typeface="Calibri"/>
-                <a:ea typeface="Calibri"/>
-                <a:cs typeface="Calibri"/>
-                <a:sym typeface="Calibri"/>
                 <a:hlinkClick r:id="rId4"/>
               </a:rPr>
-              <a:t>Elite Games</a:t>
+              <a:t>https://drive.google.com/file/d/1VmV6iOAPO8oZQOAMNa5xTQMvMxXuB-Xt/view?usp=drive_link</a:t>
             </a:r>
-            <a:endParaRPr sz="2800">
-              <a:solidFill>
-                <a:schemeClr val="dk1"/>
-              </a:solidFill>
-              <a:latin typeface="Calibri"/>
-              <a:ea typeface="Calibri"/>
-              <a:cs typeface="Calibri"/>
-              <a:sym typeface="Calibri"/>
-            </a:endParaRPr>
+            <a:endParaRPr/>
           </a:p>
         </p:txBody>
       </p:sp>
-      <p:pic>
-        <p:nvPicPr>
-          <p:cNvPr id="177" name="Google Shape;177;g3ed3806e173_0_10"/>
-          <p:cNvPicPr preferRelativeResize="0"/>
-          <p:nvPr/>
-        </p:nvPicPr>
-        <p:blipFill rotWithShape="1">
-          <a:blip r:embed="rId5">
-            <a:alphaModFix/>
-          </a:blip>
-          <a:srcRect b="5437" l="6876" r="9582" t="0"/>
-          <a:stretch/>
-        </p:blipFill>
-        <p:spPr>
-          <a:xfrm>
-            <a:off x="3698875" y="1348500"/>
-            <a:ext cx="3937000" cy="4255375"/>
-          </a:xfrm>
-          <a:prstGeom prst="rect">
-            <a:avLst/>
-          </a:prstGeom>
-          <a:noFill/>
-          <a:ln>
-            <a:noFill/>
-          </a:ln>
-        </p:spPr>
-      </p:pic>
     </p:spTree>
   </p:cSld>
   <p:clrMapOvr>
@@ -19529,17 +19692,18 @@
           <p:cNvPicPr preferRelativeResize="0"/>
           <p:nvPr/>
         </p:nvPicPr>
-        <p:blipFill rotWithShape="1">
+        <p:blipFill>
           <a:blip r:embed="rId3">
             <a:alphaModFix/>
           </a:blip>
-          <a:srcRect b="2213" l="1371" r="0" t="1131"/>
-          <a:stretch/>
+          <a:stretch>
+            <a:fillRect/>
+          </a:stretch>
         </p:blipFill>
         <p:spPr>
           <a:xfrm>
-            <a:off x="3345375" y="1359050"/>
-            <a:ext cx="5589650" cy="4994825"/>
+            <a:off x="940903" y="848725"/>
+            <a:ext cx="10320848" cy="6073825"/>
           </a:xfrm>
           <a:prstGeom prst="rect">
             <a:avLst/>
@@ -19662,8 +19826,8 @@
         </p:blipFill>
         <p:spPr>
           <a:xfrm>
-            <a:off x="2397112" y="944575"/>
-            <a:ext cx="7397775" cy="5866025"/>
+            <a:off x="749000" y="784175"/>
+            <a:ext cx="10693994" cy="6073825"/>
           </a:xfrm>
           <a:prstGeom prst="rect">
             <a:avLst/>
@@ -20009,43 +20173,16 @@
           </a:p>
         </p:txBody>
       </p:sp>
-      <p:pic>
-        <p:nvPicPr>
-          <p:cNvPr id="210" name="Google Shape;210;g3f1c4674ac0_0_24"/>
-          <p:cNvPicPr preferRelativeResize="0"/>
-          <p:nvPr/>
-        </p:nvPicPr>
-        <p:blipFill rotWithShape="1">
-          <a:blip r:embed="rId3">
-            <a:alphaModFix/>
-          </a:blip>
-          <a:srcRect b="0" l="2650" r="-3395" t="0"/>
-          <a:stretch/>
-        </p:blipFill>
-        <p:spPr>
-          <a:xfrm>
-            <a:off x="776900" y="1784300"/>
-            <a:ext cx="11251574" cy="5073700"/>
-          </a:xfrm>
-          <a:prstGeom prst="rect">
-            <a:avLst/>
-          </a:prstGeom>
-          <a:noFill/>
-          <a:ln>
-            <a:noFill/>
-          </a:ln>
-        </p:spPr>
-      </p:pic>
       <p:sp>
         <p:nvSpPr>
-          <p:cNvPr id="211" name="Google Shape;211;g3f1c4674ac0_0_24"/>
+          <p:cNvPr id="210" name="Google Shape;210;g3f1c4674ac0_0_24"/>
           <p:cNvSpPr txBox="1"/>
           <p:nvPr/>
         </p:nvSpPr>
         <p:spPr>
           <a:xfrm>
-            <a:off x="4351350" y="1196100"/>
-            <a:ext cx="3804600" cy="492600"/>
+            <a:off x="4015550" y="1196100"/>
+            <a:ext cx="4249500" cy="554100"/>
           </a:xfrm>
           <a:prstGeom prst="rect">
             <a:avLst/>
@@ -20071,23 +20208,202 @@
               <a:buNone/>
             </a:pPr>
             <a:r>
-              <a:rPr lang="en-US" sz="2000" u="sng">
+              <a:rPr lang="en-US" sz="2400" u="sng">
                 <a:solidFill>
                   <a:schemeClr val="hlink"/>
                 </a:solidFill>
-                <a:hlinkClick r:id="rId4"/>
+                <a:hlinkClick r:id="rId3"/>
               </a:rPr>
               <a:t>Elite Games — Iniciar sesión</a:t>
             </a:r>
             <a:r>
-              <a:rPr lang="en-US" sz="2000">
+              <a:rPr lang="en-US" sz="2400">
                 <a:solidFill>
                   <a:schemeClr val="dk1"/>
                 </a:solidFill>
               </a:rPr>
               <a:t> </a:t>
             </a:r>
-            <a:endParaRPr sz="2300"/>
+            <a:endParaRPr sz="2700"/>
+          </a:p>
+        </p:txBody>
+      </p:sp>
+      <p:pic>
+        <p:nvPicPr>
+          <p:cNvPr id="211" name="Google Shape;211;g3f1c4674ac0_0_24"/>
+          <p:cNvPicPr preferRelativeResize="0"/>
+          <p:nvPr/>
+        </p:nvPicPr>
+        <p:blipFill>
+          <a:blip r:embed="rId4">
+            <a:alphaModFix/>
+          </a:blip>
+          <a:stretch>
+            <a:fillRect/>
+          </a:stretch>
+        </p:blipFill>
+        <p:spPr>
+          <a:xfrm>
+            <a:off x="968163" y="1750200"/>
+            <a:ext cx="10255682" cy="4803000"/>
+          </a:xfrm>
+          <a:prstGeom prst="rect">
+            <a:avLst/>
+          </a:prstGeom>
+          <a:noFill/>
+          <a:ln>
+            <a:noFill/>
+          </a:ln>
+        </p:spPr>
+      </p:pic>
+    </p:spTree>
+  </p:cSld>
+  <p:clrMapOvr>
+    <a:masterClrMapping/>
+  </p:clrMapOvr>
+</p:sld>
+</file>
+
+<file path=ppt/slides/slide18.xml><?xml version="1.0" encoding="utf-8"?>
+<p:sld xmlns:a="http://schemas.openxmlformats.org/drawingml/2006/main" xmlns:r="http://schemas.openxmlformats.org/officeDocument/2006/relationships" xmlns:mc="http://schemas.openxmlformats.org/markup-compatibility/2006" xmlns:mv="urn:schemas-microsoft-com:mac:vml" xmlns:p="http://schemas.openxmlformats.org/presentationml/2006/main" xmlns:c="http://schemas.openxmlformats.org/drawingml/2006/chart" xmlns:dgm="http://schemas.openxmlformats.org/drawingml/2006/diagram" xmlns:o="urn:schemas-microsoft-com:office:office" xmlns:v="urn:schemas-microsoft-com:vml" xmlns:pvml="urn:schemas-microsoft-com:office:powerpoint" xmlns:com="http://schemas.openxmlformats.org/drawingml/2006/compatibility" xmlns:p14="http://schemas.microsoft.com/office/powerpoint/2010/main" xmlns:p15="http://schemas.microsoft.com/office/powerpoint/2012/main" xmlns:ahyp="http://schemas.microsoft.com/office/drawing/2018/hyperlinkcolor">
+  <p:cSld>
+    <p:spTree>
+      <p:nvGrpSpPr>
+        <p:cNvPr id="216" name="Shape 216"/>
+        <p:cNvGrpSpPr/>
+        <p:nvPr/>
+      </p:nvGrpSpPr>
+      <p:grpSpPr>
+        <a:xfrm>
+          <a:off x="0" y="0"/>
+          <a:ext cx="0" cy="0"/>
+          <a:chOff x="0" y="0"/>
+          <a:chExt cx="0" cy="0"/>
+        </a:xfrm>
+      </p:grpSpPr>
+      <p:sp>
+        <p:nvSpPr>
+          <p:cNvPr id="217" name="Google Shape;217;g3f00d7c0ea7_1_5"/>
+          <p:cNvSpPr/>
+          <p:nvPr/>
+        </p:nvSpPr>
+        <p:spPr>
+          <a:xfrm>
+            <a:off x="5325" y="20675"/>
+            <a:ext cx="12192000" cy="763500"/>
+          </a:xfrm>
+          <a:prstGeom prst="rect">
+            <a:avLst/>
+          </a:prstGeom>
+          <a:solidFill>
+            <a:srgbClr val="00AD00"/>
+          </a:solidFill>
+          <a:ln cap="flat" cmpd="sng" w="9525">
+            <a:solidFill>
+              <a:schemeClr val="dk2"/>
+            </a:solidFill>
+            <a:prstDash val="solid"/>
+            <a:round/>
+            <a:headEnd len="sm" w="sm" type="none"/>
+            <a:tailEnd len="sm" w="sm" type="none"/>
+          </a:ln>
+        </p:spPr>
+        <p:txBody>
+          <a:bodyPr anchorCtr="0" anchor="ctr" bIns="91425" lIns="91425" spcFirstLastPara="1" rIns="91425" wrap="square" tIns="91425">
+            <a:noAutofit/>
+          </a:bodyPr>
+          <a:lstStyle/>
+          <a:p>
+            <a:pPr indent="0" lvl="0" marL="0" rtl="0" algn="ctr">
+              <a:spcBef>
+                <a:spcPts val="0"/>
+              </a:spcBef>
+              <a:spcAft>
+                <a:spcPts val="0"/>
+              </a:spcAft>
+              <a:buClr>
+                <a:schemeClr val="lt1"/>
+              </a:buClr>
+              <a:buSzPts val="6000"/>
+              <a:buFont typeface="Work Sans"/>
+              <a:buNone/>
+            </a:pPr>
+            <a:r>
+              <a:rPr b="1" lang="en-US" sz="2600">
+                <a:solidFill>
+                  <a:schemeClr val="lt1"/>
+                </a:solidFill>
+                <a:latin typeface="Work Sans"/>
+                <a:ea typeface="Work Sans"/>
+                <a:cs typeface="Work Sans"/>
+                <a:sym typeface="Work Sans"/>
+              </a:rPr>
+              <a:t>Github</a:t>
+            </a:r>
+            <a:endParaRPr b="1" sz="3800">
+              <a:solidFill>
+                <a:schemeClr val="lt1"/>
+              </a:solidFill>
+              <a:latin typeface="Work Sans"/>
+              <a:ea typeface="Work Sans"/>
+              <a:cs typeface="Work Sans"/>
+              <a:sym typeface="Work Sans"/>
+            </a:endParaRPr>
+          </a:p>
+        </p:txBody>
+      </p:sp>
+      <p:sp>
+        <p:nvSpPr>
+          <p:cNvPr id="218" name="Google Shape;218;g3f00d7c0ea7_1_5"/>
+          <p:cNvSpPr txBox="1"/>
+          <p:nvPr/>
+        </p:nvSpPr>
+        <p:spPr>
+          <a:xfrm>
+            <a:off x="92825" y="944575"/>
+            <a:ext cx="11784900" cy="538800"/>
+          </a:xfrm>
+          <a:prstGeom prst="rect">
+            <a:avLst/>
+          </a:prstGeom>
+          <a:noFill/>
+          <a:ln>
+            <a:noFill/>
+          </a:ln>
+        </p:spPr>
+        <p:txBody>
+          <a:bodyPr anchorCtr="0" anchor="t" bIns="91425" lIns="91425" spcFirstLastPara="1" rIns="91425" wrap="square" tIns="91425">
+            <a:spAutoFit/>
+          </a:bodyPr>
+          <a:lstStyle/>
+          <a:p>
+            <a:pPr indent="0" lvl="0" marL="0" rtl="0" algn="l">
+              <a:spcBef>
+                <a:spcPts val="0"/>
+              </a:spcBef>
+              <a:spcAft>
+                <a:spcPts val="0"/>
+              </a:spcAft>
+              <a:buNone/>
+            </a:pPr>
+            <a:r>
+              <a:rPr lang="en-US" sz="2300" u="sng">
+                <a:solidFill>
+                  <a:schemeClr val="hlink"/>
+                </a:solidFill>
+                <a:hlinkClick r:id="rId3"/>
+              </a:rPr>
+              <a:t>PILINSAN/Elite-Games: Proyecto Sena Elite Games Pagina de venta de juegos digitales</a:t>
+            </a:r>
+            <a:r>
+              <a:rPr lang="en-US" sz="2300">
+                <a:solidFill>
+                  <a:schemeClr val="dk1"/>
+                </a:solidFill>
+              </a:rPr>
+              <a:t> </a:t>
+            </a:r>
+            <a:endParaRPr sz="2600"/>
           </a:p>
         </p:txBody>
       </p:sp>
@@ -20099,7 +20415,7 @@
 </p:sld>
 </file>
 
-<file path=ppt/slides/slide18.xml><?xml version="1.0" encoding="utf-8"?>
+<file path=ppt/slides/slide19.xml><?xml version="1.0" encoding="utf-8"?>
 <p:sld xmlns:a="http://schemas.openxmlformats.org/drawingml/2006/main" xmlns:r="http://schemas.openxmlformats.org/officeDocument/2006/relationships" xmlns:mc="http://schemas.openxmlformats.org/markup-compatibility/2006" xmlns:mv="urn:schemas-microsoft-com:mac:vml" xmlns:p="http://schemas.openxmlformats.org/presentationml/2006/main" xmlns:c="http://schemas.openxmlformats.org/drawingml/2006/chart" xmlns:dgm="http://schemas.openxmlformats.org/drawingml/2006/diagram" xmlns:o="urn:schemas-microsoft-com:office:office" xmlns:v="urn:schemas-microsoft-com:vml" xmlns:pvml="urn:schemas-microsoft-com:office:powerpoint" xmlns:com="http://schemas.openxmlformats.org/drawingml/2006/compatibility" xmlns:p14="http://schemas.microsoft.com/office/powerpoint/2010/main" xmlns:p15="http://schemas.microsoft.com/office/powerpoint/2012/main" xmlns:ahyp="http://schemas.microsoft.com/office/drawing/2018/hyperlinkcolor">
   <p:cSld>
     <p:bg>
@@ -20116,7 +20432,7 @@
     </p:bg>
     <p:spTree>
       <p:nvGrpSpPr>
-        <p:cNvPr id="215" name="Shape 215"/>
+        <p:cNvPr id="222" name="Shape 222"/>
         <p:cNvGrpSpPr/>
         <p:nvPr/>
       </p:nvGrpSpPr>
@@ -21675,7 +21991,7 @@
       </p:sp>
       <p:pic>
         <p:nvPicPr>
-          <p:cNvPr id="154" name="Google Shape;154;g3ed1c95a546_0_4" title="diagrama_er_videojuegos-.png"/>
+          <p:cNvPr id="154" name="Google Shape;154;g3ed1c95a546_0_4" title="NUEVO-DIAGRAMA-JUEVES-2-DE-JULIO.png"/>
           <p:cNvPicPr preferRelativeResize="0"/>
           <p:nvPr/>
         </p:nvPicPr>
@@ -21689,8 +22005,8 @@
         </p:blipFill>
         <p:spPr>
           <a:xfrm>
-            <a:off x="588000" y="1269125"/>
-            <a:ext cx="11104594" cy="5357099"/>
+            <a:off x="890850" y="1196100"/>
+            <a:ext cx="10498893" cy="5357101"/>
           </a:xfrm>
           <a:prstGeom prst="rect">
             <a:avLst/>
